--- a/app/templates/universidad_azul/plantilla_programa_de_especializacion.pptx
+++ b/app/templates/universidad_azul/plantilla_programa_de_especializacion.pptx
@@ -201,7 +201,7 @@
           <a:p>
             <a:fld id="{03C7FEFC-EB52-44D6-B3F1-2A7BB7FA4226}" type="datetimeFigureOut">
               <a:rPr lang="es-PE" smtClean="0"/>
-              <a:t>29/01/2026</a:t>
+              <a:t>2/02/2026</a:t>
             </a:fld>
             <a:endParaRPr lang="es-PE" dirty="0"/>
           </a:p>
@@ -366,7 +366,7 @@
           <a:p>
             <a:fld id="{64955E78-CBAA-441B-9163-D9CD5E983BDA}" type="datetimeFigureOut">
               <a:rPr lang="en-US" smtClean="0"/>
-              <a:t>1/29/2026</a:t>
+              <a:t>2/2/2026</a:t>
             </a:fld>
             <a:endParaRPr lang="en-US" dirty="0"/>
           </a:p>
@@ -765,7 +765,7 @@
           <a:p>
             <a:fld id="{5C4C4E00-4716-4B48-9D97-535E4F94A274}" type="datetimeFigureOut">
               <a:rPr lang="es-PE" smtClean="0"/>
-              <a:t>29/01/2026</a:t>
+              <a:t>2/02/2026</a:t>
             </a:fld>
             <a:endParaRPr lang="es-PE" dirty="0"/>
           </a:p>
@@ -935,7 +935,7 @@
           <a:p>
             <a:fld id="{5C4C4E00-4716-4B48-9D97-535E4F94A274}" type="datetimeFigureOut">
               <a:rPr lang="es-PE" smtClean="0"/>
-              <a:t>29/01/2026</a:t>
+              <a:t>2/02/2026</a:t>
             </a:fld>
             <a:endParaRPr lang="es-PE" dirty="0"/>
           </a:p>
@@ -1115,7 +1115,7 @@
           <a:p>
             <a:fld id="{5C4C4E00-4716-4B48-9D97-535E4F94A274}" type="datetimeFigureOut">
               <a:rPr lang="es-PE" smtClean="0"/>
-              <a:t>29/01/2026</a:t>
+              <a:t>2/02/2026</a:t>
             </a:fld>
             <a:endParaRPr lang="es-PE" dirty="0"/>
           </a:p>
@@ -1285,7 +1285,7 @@
           <a:p>
             <a:fld id="{5C4C4E00-4716-4B48-9D97-535E4F94A274}" type="datetimeFigureOut">
               <a:rPr lang="es-PE" smtClean="0"/>
-              <a:t>29/01/2026</a:t>
+              <a:t>2/02/2026</a:t>
             </a:fld>
             <a:endParaRPr lang="es-PE" dirty="0"/>
           </a:p>
@@ -1529,7 +1529,7 @@
           <a:p>
             <a:fld id="{5C4C4E00-4716-4B48-9D97-535E4F94A274}" type="datetimeFigureOut">
               <a:rPr lang="es-PE" smtClean="0"/>
-              <a:t>29/01/2026</a:t>
+              <a:t>2/02/2026</a:t>
             </a:fld>
             <a:endParaRPr lang="es-PE" dirty="0"/>
           </a:p>
@@ -1761,7 +1761,7 @@
           <a:p>
             <a:fld id="{5C4C4E00-4716-4B48-9D97-535E4F94A274}" type="datetimeFigureOut">
               <a:rPr lang="es-PE" smtClean="0"/>
-              <a:t>29/01/2026</a:t>
+              <a:t>2/02/2026</a:t>
             </a:fld>
             <a:endParaRPr lang="es-PE" dirty="0"/>
           </a:p>
@@ -2128,7 +2128,7 @@
           <a:p>
             <a:fld id="{5C4C4E00-4716-4B48-9D97-535E4F94A274}" type="datetimeFigureOut">
               <a:rPr lang="es-PE" smtClean="0"/>
-              <a:t>29/01/2026</a:t>
+              <a:t>2/02/2026</a:t>
             </a:fld>
             <a:endParaRPr lang="es-PE" dirty="0"/>
           </a:p>
@@ -2246,7 +2246,7 @@
           <a:p>
             <a:fld id="{5C4C4E00-4716-4B48-9D97-535E4F94A274}" type="datetimeFigureOut">
               <a:rPr lang="es-PE" smtClean="0"/>
-              <a:t>29/01/2026</a:t>
+              <a:t>2/02/2026</a:t>
             </a:fld>
             <a:endParaRPr lang="es-PE" dirty="0"/>
           </a:p>
@@ -2341,7 +2341,7 @@
           <a:p>
             <a:fld id="{5C4C4E00-4716-4B48-9D97-535E4F94A274}" type="datetimeFigureOut">
               <a:rPr lang="es-PE" smtClean="0"/>
-              <a:t>29/01/2026</a:t>
+              <a:t>2/02/2026</a:t>
             </a:fld>
             <a:endParaRPr lang="es-PE" dirty="0"/>
           </a:p>
@@ -2618,7 +2618,7 @@
           <a:p>
             <a:fld id="{5C4C4E00-4716-4B48-9D97-535E4F94A274}" type="datetimeFigureOut">
               <a:rPr lang="es-PE" smtClean="0"/>
-              <a:t>29/01/2026</a:t>
+              <a:t>2/02/2026</a:t>
             </a:fld>
             <a:endParaRPr lang="es-PE" dirty="0"/>
           </a:p>
@@ -2875,7 +2875,7 @@
           <a:p>
             <a:fld id="{5C4C4E00-4716-4B48-9D97-535E4F94A274}" type="datetimeFigureOut">
               <a:rPr lang="es-PE" smtClean="0"/>
-              <a:t>29/01/2026</a:t>
+              <a:t>2/02/2026</a:t>
             </a:fld>
             <a:endParaRPr lang="es-PE" dirty="0"/>
           </a:p>
@@ -3088,7 +3088,7 @@
           <a:p>
             <a:fld id="{5C4C4E00-4716-4B48-9D97-535E4F94A274}" type="datetimeFigureOut">
               <a:rPr lang="es-PE" smtClean="0"/>
-              <a:t>29/01/2026</a:t>
+              <a:t>2/02/2026</a:t>
             </a:fld>
             <a:endParaRPr lang="es-PE" dirty="0"/>
           </a:p>
@@ -6056,14 +6056,14 @@
           <p:nvPr>
             <p:extLst>
               <p:ext uri="{D42A27DB-BD31-4B8C-83A1-F6EECF244321}">
-                <p14:modId xmlns:p14="http://schemas.microsoft.com/office/powerpoint/2010/main" val="3773386519"/>
+                <p14:modId xmlns:p14="http://schemas.microsoft.com/office/powerpoint/2010/main" val="1384812688"/>
               </p:ext>
             </p:extLst>
           </p:nvPr>
         </p:nvGraphicFramePr>
         <p:xfrm>
           <a:off x="745017" y="3319125"/>
-          <a:ext cx="5367967" cy="4064562"/>
+          <a:ext cx="5367967" cy="4710006"/>
         </p:xfrm>
         <a:graphic>
           <a:graphicData uri="http://schemas.openxmlformats.org/drawingml/2006/table">
@@ -6260,7 +6260,7 @@
                             <a:schemeClr val="tx1"/>
                           </a:solidFill>
                         </a:rPr>
-                        <a:t>150</a:t>
+                        <a:t>{{HORAS_MODULO}}</a:t>
                       </a:r>
                     </a:p>
                   </a:txBody>
@@ -6349,7 +6349,7 @@
                       <a:pPr algn="ctr"/>
                       <a:r>
                         <a:rPr lang="en-US" sz="1050" b="0" dirty="0"/>
-                        <a:t>150</a:t>
+                        <a:t>{{HORAS_MODULO}}</a:t>
                       </a:r>
                     </a:p>
                   </a:txBody>
@@ -6426,7 +6426,7 @@
                             <a:schemeClr val="tx1"/>
                           </a:solidFill>
                         </a:rPr>
-                        <a:t>150</a:t>
+                        <a:t>{{HORAS_MODULO}}</a:t>
                       </a:r>
                     </a:p>
                   </a:txBody>
@@ -6524,7 +6524,7 @@
                       <a:pPr algn="ctr"/>
                       <a:r>
                         <a:rPr lang="en-US" sz="1050" b="0" dirty="0"/>
-                        <a:t>150</a:t>
+                        <a:t>{{HORAS_MODULO}}</a:t>
                       </a:r>
                     </a:p>
                   </a:txBody>
@@ -6626,7 +6626,7 @@
                             <a:schemeClr val="tx1"/>
                           </a:solidFill>
                         </a:rPr>
-                        <a:t>150</a:t>
+                        <a:t>{{HORAS_MODULO}}</a:t>
                       </a:r>
                     </a:p>
                   </a:txBody>
@@ -6724,7 +6724,7 @@
                       <a:pPr algn="ctr"/>
                       <a:r>
                         <a:rPr lang="en-US" sz="1050" b="0" dirty="0"/>
-                        <a:t>150</a:t>
+                        <a:t>{{HORAS_MODULO}}</a:t>
                       </a:r>
                     </a:p>
                   </a:txBody>
@@ -6801,10 +6801,9 @@
                         <a:defRPr/>
                       </a:pPr>
                       <a:r>
-                        <a:rPr lang="es-ES" sz="1000"/>
+                        <a:rPr lang="es-ES" sz="1000" dirty="0"/>
                         <a:t>{{MODULO_7}}</a:t>
                       </a:r>
-                      <a:endParaRPr lang="es-ES" sz="1000" dirty="0"/>
                     </a:p>
                   </a:txBody>
                   <a:tcPr anchor="ctr"/>
@@ -6821,7 +6820,7 @@
                             <a:schemeClr val="tx1"/>
                           </a:solidFill>
                         </a:rPr>
-                        <a:t>150</a:t>
+                        <a:t>{{HORAS_MODULO}}</a:t>
                       </a:r>
                     </a:p>
                   </a:txBody>
@@ -6897,7 +6896,7 @@
                       <a:pPr algn="ctr"/>
                       <a:r>
                         <a:rPr lang="en-US" sz="1050" b="0" dirty="0"/>
-                        <a:t>150</a:t>
+                        <a:t>{{HORAS_MODULO}}</a:t>
                       </a:r>
                     </a:p>
                   </a:txBody>
@@ -6989,7 +6988,7 @@
                         <a:defRPr/>
                       </a:pPr>
                       <a:r>
-                        <a:rPr lang="es-ES" sz="1050" b="0" kern="1200" dirty="0">
+                        <a:rPr lang="es-ES" sz="1050" b="0" kern="1200">
                           <a:solidFill>
                             <a:schemeClr val="dk1"/>
                           </a:solidFill>
@@ -6997,7 +6996,7 @@
                           <a:ea typeface="+mn-ea"/>
                           <a:cs typeface="+mn-cs"/>
                         </a:rPr>
-                        <a:t>1200</a:t>
+                        <a:t>{{HORAS_ACADEMICAS}}</a:t>
                       </a:r>
                       <a:endParaRPr lang="en-US" sz="1050" b="0" kern="1200" dirty="0">
                         <a:solidFill>

--- a/app/templates/universidad_azul/plantilla_programa_de_especializacion.pptx
+++ b/app/templates/universidad_azul/plantilla_programa_de_especializacion.pptx
@@ -119,6 +119,74 @@
 </p:presentation>
 </file>
 
+<file path=ppt/revisionInfo.xml><?xml version="1.0" encoding="utf-8"?>
+<p1510:revInfo xmlns:a="http://schemas.openxmlformats.org/drawingml/2006/main" xmlns:r="http://schemas.openxmlformats.org/officeDocument/2006/relationships" xmlns:p1510="http://schemas.microsoft.com/office/powerpoint/2015/10/main">
+  <p1510:revLst>
+    <p1510:client id="{79DD9C94-355C-4CB0-BA32-5215F3FB7B8B}" v="3" dt="2026-02-27T23:42:41.313"/>
+  </p1510:revLst>
+</p1510:revInfo>
+</file>
+
+<file path=ppt/changesInfos/changesInfo1.xml><?xml version="1.0" encoding="utf-8"?>
+<pc:chgInfo xmlns:a="http://schemas.openxmlformats.org/drawingml/2006/main" xmlns:r="http://schemas.openxmlformats.org/officeDocument/2006/relationships" xmlns:ac="http://schemas.microsoft.com/office/drawing/2013/main/command" xmlns:pc="http://schemas.microsoft.com/office/powerpoint/2013/main/command">
+  <pc:docChgLst>
+    <pc:chgData name="Benjamín de Jesús Cueva Niño de Guzmán" userId="56da303013910523" providerId="LiveId" clId="{532B7A48-8887-4F62-9537-0BA1FAE83637}"/>
+    <pc:docChg chg="undo custSel modSld">
+      <pc:chgData name="Benjamín de Jesús Cueva Niño de Guzmán" userId="56da303013910523" providerId="LiveId" clId="{532B7A48-8887-4F62-9537-0BA1FAE83637}" dt="2026-02-27T23:58:37.216" v="117" actId="1035"/>
+      <pc:docMkLst>
+        <pc:docMk/>
+      </pc:docMkLst>
+      <pc:sldChg chg="modSp mod">
+        <pc:chgData name="Benjamín de Jesús Cueva Niño de Guzmán" userId="56da303013910523" providerId="LiveId" clId="{532B7A48-8887-4F62-9537-0BA1FAE83637}" dt="2026-02-27T23:58:37.216" v="117" actId="1035"/>
+        <pc:sldMkLst>
+          <pc:docMk/>
+          <pc:sldMk cId="52070105" sldId="290"/>
+        </pc:sldMkLst>
+        <pc:spChg chg="mod">
+          <ac:chgData name="Benjamín de Jesús Cueva Niño de Guzmán" userId="56da303013910523" providerId="LiveId" clId="{532B7A48-8887-4F62-9537-0BA1FAE83637}" dt="2026-02-27T23:58:37.216" v="117" actId="1035"/>
+          <ac:spMkLst>
+            <pc:docMk/>
+            <pc:sldMk cId="52070105" sldId="290"/>
+            <ac:spMk id="2" creationId="{00000000-0000-0000-0000-000000000000}"/>
+          </ac:spMkLst>
+        </pc:spChg>
+        <pc:spChg chg="mod">
+          <ac:chgData name="Benjamín de Jesús Cueva Niño de Guzmán" userId="56da303013910523" providerId="LiveId" clId="{532B7A48-8887-4F62-9537-0BA1FAE83637}" dt="2026-02-27T23:58:33.139" v="114" actId="1035"/>
+          <ac:spMkLst>
+            <pc:docMk/>
+            <pc:sldMk cId="52070105" sldId="290"/>
+            <ac:spMk id="19" creationId="{00000000-0000-0000-0000-000000000000}"/>
+          </ac:spMkLst>
+        </pc:spChg>
+      </pc:sldChg>
+      <pc:sldChg chg="modSp mod">
+        <pc:chgData name="Benjamín de Jesús Cueva Niño de Guzmán" userId="56da303013910523" providerId="LiveId" clId="{532B7A48-8887-4F62-9537-0BA1FAE83637}" dt="2026-02-27T23:40:52.276" v="107" actId="962"/>
+        <pc:sldMkLst>
+          <pc:docMk/>
+          <pc:sldMk cId="3083265798" sldId="291"/>
+        </pc:sldMkLst>
+        <pc:spChg chg="mod">
+          <ac:chgData name="Benjamín de Jesús Cueva Niño de Guzmán" userId="56da303013910523" providerId="LiveId" clId="{532B7A48-8887-4F62-9537-0BA1FAE83637}" dt="2026-02-27T23:40:52.276" v="107" actId="962"/>
+          <ac:spMkLst>
+            <pc:docMk/>
+            <pc:sldMk cId="3083265798" sldId="291"/>
+            <ac:spMk id="18" creationId="{00000000-0000-0000-0000-000000000000}"/>
+          </ac:spMkLst>
+        </pc:spChg>
+        <pc:graphicFrameChg chg="mod modGraphic">
+          <ac:chgData name="Benjamín de Jesús Cueva Niño de Guzmán" userId="56da303013910523" providerId="LiveId" clId="{532B7A48-8887-4F62-9537-0BA1FAE83637}" dt="2026-02-27T23:40:43.973" v="106" actId="962"/>
+          <ac:graphicFrameMkLst>
+            <pc:docMk/>
+            <pc:sldMk cId="3083265798" sldId="291"/>
+            <ac:graphicFrameMk id="24" creationId="{00000000-0000-0000-0000-000000000000}"/>
+          </ac:graphicFrameMkLst>
+        </pc:graphicFrameChg>
+      </pc:sldChg>
+    </pc:docChg>
+  </pc:docChgLst>
+</pc:chgInfo>
+</file>
+
 <file path=ppt/handoutMasters/handoutMaster1.xml><?xml version="1.0" encoding="utf-8"?>
 <p:handoutMaster xmlns:a="http://schemas.openxmlformats.org/drawingml/2006/main" xmlns:r="http://schemas.openxmlformats.org/officeDocument/2006/relationships" xmlns:p="http://schemas.openxmlformats.org/presentationml/2006/main">
   <p:cSld>
@@ -201,7 +269,7 @@
           <a:p>
             <a:fld id="{03C7FEFC-EB52-44D6-B3F1-2A7BB7FA4226}" type="datetimeFigureOut">
               <a:rPr lang="es-PE" smtClean="0"/>
-              <a:t>2/02/2026</a:t>
+              <a:t>27/02/2026</a:t>
             </a:fld>
             <a:endParaRPr lang="es-PE" dirty="0"/>
           </a:p>
@@ -366,7 +434,7 @@
           <a:p>
             <a:fld id="{64955E78-CBAA-441B-9163-D9CD5E983BDA}" type="datetimeFigureOut">
               <a:rPr lang="en-US" smtClean="0"/>
-              <a:t>2/2/2026</a:t>
+              <a:t>2/27/2026</a:t>
             </a:fld>
             <a:endParaRPr lang="en-US" dirty="0"/>
           </a:p>
@@ -765,7 +833,7 @@
           <a:p>
             <a:fld id="{5C4C4E00-4716-4B48-9D97-535E4F94A274}" type="datetimeFigureOut">
               <a:rPr lang="es-PE" smtClean="0"/>
-              <a:t>2/02/2026</a:t>
+              <a:t>27/02/2026</a:t>
             </a:fld>
             <a:endParaRPr lang="es-PE" dirty="0"/>
           </a:p>
@@ -935,7 +1003,7 @@
           <a:p>
             <a:fld id="{5C4C4E00-4716-4B48-9D97-535E4F94A274}" type="datetimeFigureOut">
               <a:rPr lang="es-PE" smtClean="0"/>
-              <a:t>2/02/2026</a:t>
+              <a:t>27/02/2026</a:t>
             </a:fld>
             <a:endParaRPr lang="es-PE" dirty="0"/>
           </a:p>
@@ -1115,7 +1183,7 @@
           <a:p>
             <a:fld id="{5C4C4E00-4716-4B48-9D97-535E4F94A274}" type="datetimeFigureOut">
               <a:rPr lang="es-PE" smtClean="0"/>
-              <a:t>2/02/2026</a:t>
+              <a:t>27/02/2026</a:t>
             </a:fld>
             <a:endParaRPr lang="es-PE" dirty="0"/>
           </a:p>
@@ -1285,7 +1353,7 @@
           <a:p>
             <a:fld id="{5C4C4E00-4716-4B48-9D97-535E4F94A274}" type="datetimeFigureOut">
               <a:rPr lang="es-PE" smtClean="0"/>
-              <a:t>2/02/2026</a:t>
+              <a:t>27/02/2026</a:t>
             </a:fld>
             <a:endParaRPr lang="es-PE" dirty="0"/>
           </a:p>
@@ -1529,7 +1597,7 @@
           <a:p>
             <a:fld id="{5C4C4E00-4716-4B48-9D97-535E4F94A274}" type="datetimeFigureOut">
               <a:rPr lang="es-PE" smtClean="0"/>
-              <a:t>2/02/2026</a:t>
+              <a:t>27/02/2026</a:t>
             </a:fld>
             <a:endParaRPr lang="es-PE" dirty="0"/>
           </a:p>
@@ -1761,7 +1829,7 @@
           <a:p>
             <a:fld id="{5C4C4E00-4716-4B48-9D97-535E4F94A274}" type="datetimeFigureOut">
               <a:rPr lang="es-PE" smtClean="0"/>
-              <a:t>2/02/2026</a:t>
+              <a:t>27/02/2026</a:t>
             </a:fld>
             <a:endParaRPr lang="es-PE" dirty="0"/>
           </a:p>
@@ -2128,7 +2196,7 @@
           <a:p>
             <a:fld id="{5C4C4E00-4716-4B48-9D97-535E4F94A274}" type="datetimeFigureOut">
               <a:rPr lang="es-PE" smtClean="0"/>
-              <a:t>2/02/2026</a:t>
+              <a:t>27/02/2026</a:t>
             </a:fld>
             <a:endParaRPr lang="es-PE" dirty="0"/>
           </a:p>
@@ -2246,7 +2314,7 @@
           <a:p>
             <a:fld id="{5C4C4E00-4716-4B48-9D97-535E4F94A274}" type="datetimeFigureOut">
               <a:rPr lang="es-PE" smtClean="0"/>
-              <a:t>2/02/2026</a:t>
+              <a:t>27/02/2026</a:t>
             </a:fld>
             <a:endParaRPr lang="es-PE" dirty="0"/>
           </a:p>
@@ -2341,7 +2409,7 @@
           <a:p>
             <a:fld id="{5C4C4E00-4716-4B48-9D97-535E4F94A274}" type="datetimeFigureOut">
               <a:rPr lang="es-PE" smtClean="0"/>
-              <a:t>2/02/2026</a:t>
+              <a:t>27/02/2026</a:t>
             </a:fld>
             <a:endParaRPr lang="es-PE" dirty="0"/>
           </a:p>
@@ -2618,7 +2686,7 @@
           <a:p>
             <a:fld id="{5C4C4E00-4716-4B48-9D97-535E4F94A274}" type="datetimeFigureOut">
               <a:rPr lang="es-PE" smtClean="0"/>
-              <a:t>2/02/2026</a:t>
+              <a:t>27/02/2026</a:t>
             </a:fld>
             <a:endParaRPr lang="es-PE" dirty="0"/>
           </a:p>
@@ -2875,7 +2943,7 @@
           <a:p>
             <a:fld id="{5C4C4E00-4716-4B48-9D97-535E4F94A274}" type="datetimeFigureOut">
               <a:rPr lang="es-PE" smtClean="0"/>
-              <a:t>2/02/2026</a:t>
+              <a:t>27/02/2026</a:t>
             </a:fld>
             <a:endParaRPr lang="es-PE" dirty="0"/>
           </a:p>
@@ -3088,7 +3156,7 @@
           <a:p>
             <a:fld id="{5C4C4E00-4716-4B48-9D97-535E4F94A274}" type="datetimeFigureOut">
               <a:rPr lang="es-PE" smtClean="0"/>
-              <a:t>2/02/2026</a:t>
+              <a:t>27/02/2026</a:t>
             </a:fld>
             <a:endParaRPr lang="es-PE" dirty="0"/>
           </a:p>
@@ -3578,7 +3646,7 @@
         </p:nvSpPr>
         <p:spPr>
           <a:xfrm>
-            <a:off x="474329" y="3082550"/>
+            <a:off x="474329" y="3042209"/>
             <a:ext cx="5909343" cy="954107"/>
           </a:xfrm>
           <a:prstGeom prst="rect">
@@ -4320,14 +4388,14 @@
       </p:sp>
       <p:sp>
         <p:nvSpPr>
-          <p:cNvPr id="19" name="Rectangle 60"/>
+          <p:cNvPr id="19" name="PH_CONTENIDO_PRINCIPAL"/>
           <p:cNvSpPr/>
           <p:nvPr/>
         </p:nvSpPr>
         <p:spPr>
           <a:xfrm>
-            <a:off x="477169" y="4290909"/>
-            <a:ext cx="5903662" cy="2967105"/>
+            <a:off x="477169" y="3968181"/>
+            <a:ext cx="5903662" cy="2246769"/>
           </a:xfrm>
           <a:prstGeom prst="rect">
             <a:avLst/>
@@ -4337,8 +4405,8 @@
           </a:ln>
         </p:spPr>
         <p:txBody>
-          <a:bodyPr vert="horz" lIns="0" tIns="0" rIns="0" bIns="0" rtlCol="0" anchor="ctr">
-            <a:noAutofit/>
+          <a:bodyPr vert="horz" lIns="0" tIns="0" rIns="0" bIns="0" rtlCol="0" anchor="t" anchorCtr="1">
+            <a:spAutoFit/>
           </a:bodyPr>
           <a:lstStyle>
             <a:defPPr>
@@ -5845,7 +5913,7 @@
       </p:pic>
       <p:sp>
         <p:nvSpPr>
-          <p:cNvPr id="18" name="CuadroTexto 17"/>
+          <p:cNvPr id="18" name="PH_TEMA"/>
           <p:cNvSpPr txBox="1"/>
           <p:nvPr/>
         </p:nvSpPr>
@@ -6049,20 +6117,20 @@
       </p:pic>
       <p:graphicFrame>
         <p:nvGraphicFramePr>
-          <p:cNvPr id="24" name="Tabla 23"/>
+          <p:cNvPr id="24" name="PH_TABLA"/>
           <p:cNvGraphicFramePr>
             <a:graphicFrameLocks noGrp="1"/>
           </p:cNvGraphicFramePr>
           <p:nvPr>
             <p:extLst>
               <p:ext uri="{D42A27DB-BD31-4B8C-83A1-F6EECF244321}">
-                <p14:modId xmlns:p14="http://schemas.microsoft.com/office/powerpoint/2010/main" val="1384812688"/>
+                <p14:modId xmlns:p14="http://schemas.microsoft.com/office/powerpoint/2010/main" val="4157756245"/>
               </p:ext>
             </p:extLst>
           </p:nvPr>
         </p:nvGraphicFramePr>
         <p:xfrm>
-          <a:off x="745017" y="3319125"/>
+          <a:off x="745017" y="3103973"/>
           <a:ext cx="5367967" cy="4710006"/>
         </p:xfrm>
         <a:graphic>
@@ -6241,7 +6309,7 @@
                     <a:p>
                       <a:pPr algn="ctr"/>
                       <a:r>
-                        <a:rPr lang="es-ES" sz="1000" dirty="0"/>
+                        <a:rPr lang="es-ES" sz="900" dirty="0"/>
                         <a:t>{{MODULO_1}}</a:t>
                       </a:r>
                     </a:p>
@@ -6334,7 +6402,7 @@
                         <a:defRPr/>
                       </a:pPr>
                       <a:r>
-                        <a:rPr lang="es-ES" sz="1000" dirty="0"/>
+                        <a:rPr lang="es-ES" sz="900" dirty="0"/>
                         <a:t>{{MODULO_2}}</a:t>
                       </a:r>
                     </a:p>
@@ -6407,7 +6475,7 @@
                         <a:defRPr/>
                       </a:pPr>
                       <a:r>
-                        <a:rPr lang="es-ES" sz="1000" dirty="0"/>
+                        <a:rPr lang="es-ES" sz="900" dirty="0"/>
                         <a:t>{{MODULO_3}}</a:t>
                       </a:r>
                     </a:p>
@@ -6500,10 +6568,10 @@
                         <a:defRPr/>
                       </a:pPr>
                       <a:r>
-                        <a:rPr lang="es-ES" sz="1000" dirty="0"/>
+                        <a:rPr lang="es-ES" sz="900" dirty="0"/>
                         <a:t>{{MODULO_4}}</a:t>
                       </a:r>
-                      <a:endParaRPr lang="es-ES" sz="1000" b="0" i="0" kern="1200" dirty="0">
+                      <a:endParaRPr lang="es-ES" sz="900" b="0" i="0" kern="1200" dirty="0">
                         <a:solidFill>
                           <a:schemeClr val="dk1"/>
                         </a:solidFill>
@@ -6598,10 +6666,10 @@
                         <a:defRPr/>
                       </a:pPr>
                       <a:r>
-                        <a:rPr lang="es-ES" sz="1000" dirty="0"/>
+                        <a:rPr lang="es-ES" sz="900" dirty="0"/>
                         <a:t>{{MODULO_5}}</a:t>
                       </a:r>
-                      <a:endParaRPr lang="es-ES" sz="1000" b="0" i="0" kern="1200" dirty="0">
+                      <a:endParaRPr lang="es-ES" sz="900" b="0" i="0" kern="1200" dirty="0">
                         <a:solidFill>
                           <a:schemeClr val="dk1"/>
                         </a:solidFill>
@@ -6700,10 +6768,10 @@
                         <a:defRPr/>
                       </a:pPr>
                       <a:r>
-                        <a:rPr lang="es-ES" sz="1000" dirty="0"/>
+                        <a:rPr lang="es-ES" sz="900" dirty="0"/>
                         <a:t>{{MODULO_6}}</a:t>
                       </a:r>
-                      <a:endParaRPr lang="es-ES" sz="1000" b="0" i="0" kern="1200" dirty="0">
+                      <a:endParaRPr lang="es-ES" sz="900" b="0" i="0" kern="1200" dirty="0">
                         <a:solidFill>
                           <a:schemeClr val="dk1"/>
                         </a:solidFill>
@@ -6801,7 +6869,7 @@
                         <a:defRPr/>
                       </a:pPr>
                       <a:r>
-                        <a:rPr lang="es-ES" sz="1000" dirty="0"/>
+                        <a:rPr lang="es-ES" sz="900" dirty="0"/>
                         <a:t>{{MODULO_7}}</a:t>
                       </a:r>
                     </a:p>
@@ -6881,7 +6949,7 @@
                     <a:p>
                       <a:pPr algn="ctr"/>
                       <a:r>
-                        <a:rPr lang="es-ES" sz="1000" dirty="0"/>
+                        <a:rPr lang="es-ES" sz="900" dirty="0"/>
                         <a:t>{{MODULO_8}}</a:t>
                       </a:r>
                     </a:p>

--- a/app/templates/universidad_azul/plantilla_programa_de_especializacion.pptx
+++ b/app/templates/universidad_azul/plantilla_programa_de_especializacion.pptx
@@ -132,12 +132,12 @@
   <pc:docChgLst>
     <pc:chgData name="Benjamín de Jesús Cueva Niño de Guzmán" userId="56da303013910523" providerId="LiveId" clId="{532B7A48-8887-4F62-9537-0BA1FAE83637}"/>
     <pc:docChg chg="undo custSel modSld">
-      <pc:chgData name="Benjamín de Jesús Cueva Niño de Guzmán" userId="56da303013910523" providerId="LiveId" clId="{532B7A48-8887-4F62-9537-0BA1FAE83637}" dt="2026-02-27T23:58:37.216" v="117" actId="1035"/>
+      <pc:chgData name="Benjamín de Jesús Cueva Niño de Guzmán" userId="56da303013910523" providerId="LiveId" clId="{532B7A48-8887-4F62-9537-0BA1FAE83637}" dt="2026-03-05T18:29:41.874" v="126" actId="1035"/>
       <pc:docMkLst>
         <pc:docMk/>
       </pc:docMkLst>
       <pc:sldChg chg="modSp mod">
-        <pc:chgData name="Benjamín de Jesús Cueva Niño de Guzmán" userId="56da303013910523" providerId="LiveId" clId="{532B7A48-8887-4F62-9537-0BA1FAE83637}" dt="2026-02-27T23:58:37.216" v="117" actId="1035"/>
+        <pc:chgData name="Benjamín de Jesús Cueva Niño de Guzmán" userId="56da303013910523" providerId="LiveId" clId="{532B7A48-8887-4F62-9537-0BA1FAE83637}" dt="2026-03-05T18:29:41.874" v="126" actId="1035"/>
         <pc:sldMkLst>
           <pc:docMk/>
           <pc:sldMk cId="52070105" sldId="290"/>
@@ -151,7 +151,15 @@
           </ac:spMkLst>
         </pc:spChg>
         <pc:spChg chg="mod">
-          <ac:chgData name="Benjamín de Jesús Cueva Niño de Guzmán" userId="56da303013910523" providerId="LiveId" clId="{532B7A48-8887-4F62-9537-0BA1FAE83637}" dt="2026-02-27T23:58:33.139" v="114" actId="1035"/>
+          <ac:chgData name="Benjamín de Jesús Cueva Niño de Guzmán" userId="56da303013910523" providerId="LiveId" clId="{532B7A48-8887-4F62-9537-0BA1FAE83637}" dt="2026-03-04T23:09:55.249" v="121" actId="1036"/>
+          <ac:spMkLst>
+            <pc:docMk/>
+            <pc:sldMk cId="52070105" sldId="290"/>
+            <ac:spMk id="3" creationId="{00000000-0000-0000-0000-000000000000}"/>
+          </ac:spMkLst>
+        </pc:spChg>
+        <pc:spChg chg="mod">
+          <ac:chgData name="Benjamín de Jesús Cueva Niño de Guzmán" userId="56da303013910523" providerId="LiveId" clId="{532B7A48-8887-4F62-9537-0BA1FAE83637}" dt="2026-03-05T18:29:41.874" v="126" actId="1035"/>
           <ac:spMkLst>
             <pc:docMk/>
             <pc:sldMk cId="52070105" sldId="290"/>
@@ -269,7 +277,7 @@
           <a:p>
             <a:fld id="{03C7FEFC-EB52-44D6-B3F1-2A7BB7FA4226}" type="datetimeFigureOut">
               <a:rPr lang="es-PE" smtClean="0"/>
-              <a:t>27/02/2026</a:t>
+              <a:t>5/03/2026</a:t>
             </a:fld>
             <a:endParaRPr lang="es-PE" dirty="0"/>
           </a:p>
@@ -434,7 +442,7 @@
           <a:p>
             <a:fld id="{64955E78-CBAA-441B-9163-D9CD5E983BDA}" type="datetimeFigureOut">
               <a:rPr lang="en-US" smtClean="0"/>
-              <a:t>2/27/2026</a:t>
+              <a:t>3/5/2026</a:t>
             </a:fld>
             <a:endParaRPr lang="en-US" dirty="0"/>
           </a:p>
@@ -833,7 +841,7 @@
           <a:p>
             <a:fld id="{5C4C4E00-4716-4B48-9D97-535E4F94A274}" type="datetimeFigureOut">
               <a:rPr lang="es-PE" smtClean="0"/>
-              <a:t>27/02/2026</a:t>
+              <a:t>5/03/2026</a:t>
             </a:fld>
             <a:endParaRPr lang="es-PE" dirty="0"/>
           </a:p>
@@ -1003,7 +1011,7 @@
           <a:p>
             <a:fld id="{5C4C4E00-4716-4B48-9D97-535E4F94A274}" type="datetimeFigureOut">
               <a:rPr lang="es-PE" smtClean="0"/>
-              <a:t>27/02/2026</a:t>
+              <a:t>5/03/2026</a:t>
             </a:fld>
             <a:endParaRPr lang="es-PE" dirty="0"/>
           </a:p>
@@ -1183,7 +1191,7 @@
           <a:p>
             <a:fld id="{5C4C4E00-4716-4B48-9D97-535E4F94A274}" type="datetimeFigureOut">
               <a:rPr lang="es-PE" smtClean="0"/>
-              <a:t>27/02/2026</a:t>
+              <a:t>5/03/2026</a:t>
             </a:fld>
             <a:endParaRPr lang="es-PE" dirty="0"/>
           </a:p>
@@ -1353,7 +1361,7 @@
           <a:p>
             <a:fld id="{5C4C4E00-4716-4B48-9D97-535E4F94A274}" type="datetimeFigureOut">
               <a:rPr lang="es-PE" smtClean="0"/>
-              <a:t>27/02/2026</a:t>
+              <a:t>5/03/2026</a:t>
             </a:fld>
             <a:endParaRPr lang="es-PE" dirty="0"/>
           </a:p>
@@ -1597,7 +1605,7 @@
           <a:p>
             <a:fld id="{5C4C4E00-4716-4B48-9D97-535E4F94A274}" type="datetimeFigureOut">
               <a:rPr lang="es-PE" smtClean="0"/>
-              <a:t>27/02/2026</a:t>
+              <a:t>5/03/2026</a:t>
             </a:fld>
             <a:endParaRPr lang="es-PE" dirty="0"/>
           </a:p>
@@ -1829,7 +1837,7 @@
           <a:p>
             <a:fld id="{5C4C4E00-4716-4B48-9D97-535E4F94A274}" type="datetimeFigureOut">
               <a:rPr lang="es-PE" smtClean="0"/>
-              <a:t>27/02/2026</a:t>
+              <a:t>5/03/2026</a:t>
             </a:fld>
             <a:endParaRPr lang="es-PE" dirty="0"/>
           </a:p>
@@ -2196,7 +2204,7 @@
           <a:p>
             <a:fld id="{5C4C4E00-4716-4B48-9D97-535E4F94A274}" type="datetimeFigureOut">
               <a:rPr lang="es-PE" smtClean="0"/>
-              <a:t>27/02/2026</a:t>
+              <a:t>5/03/2026</a:t>
             </a:fld>
             <a:endParaRPr lang="es-PE" dirty="0"/>
           </a:p>
@@ -2314,7 +2322,7 @@
           <a:p>
             <a:fld id="{5C4C4E00-4716-4B48-9D97-535E4F94A274}" type="datetimeFigureOut">
               <a:rPr lang="es-PE" smtClean="0"/>
-              <a:t>27/02/2026</a:t>
+              <a:t>5/03/2026</a:t>
             </a:fld>
             <a:endParaRPr lang="es-PE" dirty="0"/>
           </a:p>
@@ -2409,7 +2417,7 @@
           <a:p>
             <a:fld id="{5C4C4E00-4716-4B48-9D97-535E4F94A274}" type="datetimeFigureOut">
               <a:rPr lang="es-PE" smtClean="0"/>
-              <a:t>27/02/2026</a:t>
+              <a:t>5/03/2026</a:t>
             </a:fld>
             <a:endParaRPr lang="es-PE" dirty="0"/>
           </a:p>
@@ -2686,7 +2694,7 @@
           <a:p>
             <a:fld id="{5C4C4E00-4716-4B48-9D97-535E4F94A274}" type="datetimeFigureOut">
               <a:rPr lang="es-PE" smtClean="0"/>
-              <a:t>27/02/2026</a:t>
+              <a:t>5/03/2026</a:t>
             </a:fld>
             <a:endParaRPr lang="es-PE" dirty="0"/>
           </a:p>
@@ -2943,7 +2951,7 @@
           <a:p>
             <a:fld id="{5C4C4E00-4716-4B48-9D97-535E4F94A274}" type="datetimeFigureOut">
               <a:rPr lang="es-PE" smtClean="0"/>
-              <a:t>27/02/2026</a:t>
+              <a:t>5/03/2026</a:t>
             </a:fld>
             <a:endParaRPr lang="es-PE" dirty="0"/>
           </a:p>
@@ -3156,7 +3164,7 @@
           <a:p>
             <a:fld id="{5C4C4E00-4716-4B48-9D97-535E4F94A274}" type="datetimeFigureOut">
               <a:rPr lang="es-PE" smtClean="0"/>
-              <a:t>27/02/2026</a:t>
+              <a:t>5/03/2026</a:t>
             </a:fld>
             <a:endParaRPr lang="es-PE" dirty="0"/>
           </a:p>
@@ -4394,8 +4402,8 @@
         </p:nvSpPr>
         <p:spPr>
           <a:xfrm>
-            <a:off x="477169" y="3968181"/>
-            <a:ext cx="5903662" cy="2246769"/>
+            <a:off x="419400" y="3941287"/>
+            <a:ext cx="6019200" cy="2246769"/>
           </a:xfrm>
           <a:prstGeom prst="rect">
             <a:avLst/>
